--- a/slides/pptx/week19.pptx
+++ b/slides/pptx/week19.pptx
@@ -595,7 +595,7 @@
           <a:p>
             <a:r>
               <a:rPr lang="en-US" dirty="0"/>
-              <a:t>Time-box the 240-min block: CTF tournament first (energy), then graded demos. Tell teams their demo slot up front.</a:t>
+              <a:t>The CTF tournament is the live part. Demo videos were graded beforehand; after the CTF, call aside only the teams you flagged for a short viva-style Q&amp;A.</a:t>
             </a:r>
             <a:endParaRPr lang="en-US" dirty="0"/>
           </a:p>
@@ -771,7 +771,7 @@
           <a:p>
             <a:r>
               <a:rPr lang="en-US" dirty="0"/>
-              <a:t>Format change (2026-07-26): with N≈80–120 students in teams of 2–3, a 10-min-demo+5-min-Q&amp;A live format needs far more than the 90 minutes this block has — it cannot physically run. Video is graded beforehand on the project rubric (project/README.md) + peer-contribution multiplier; the live slot is a short viva-style Q&amp;A only, to confirm the work is theirs — not a re-demo.</a:t>
+              <a:t>Format change (2026-07-26): with N≈80–120 students in teams of 2–3, a 10-min-demo+5-min-Q&amp;A live format needs far more than the 90 minutes this block has — it cannot physically run. Video is graded beforehand on the project rubric (project/README.md) + peer-contribution multiplier; live Q&amp;A only as a viva spot-check for teams the instructor flags (decided 2026-10-24: the final day already holds the written exam and the CTF) — not a re-demo.</a:t>
             </a:r>
             <a:endParaRPr lang="en-US" dirty="0"/>
           </a:p>
@@ -1322,7 +1322,7 @@
       </p:grpSpPr>
       <p:pic>
         <p:nvPicPr>
-          <p:cNvPr id="2" name="Image 0" descr="/Users/pop7/Library/CloudStorage/OneDrive-MonsterConnectCo.,Ltd/Lecture/KOSEN69 - software-security/slides/pptx/assets/logo-small.png">    </p:cNvPr>
+          <p:cNvPr id="2" name="Image 0" descr="/private/tmp/claude-501/-Users-pop7-Library-CloudStorage-OneDrive-MonsterConnectCo--Ltd-Lecture-KOSEN69---software-security/f63a82af-e1ad-40ed-89c4-03c6ca776e3f/scratchpad/lq-docs/slides/pptx/assets/logo-small.png">    </p:cNvPr>
           <p:cNvPicPr>
             <a:picLocks noChangeAspect="1"/>
           </p:cNvPicPr>
@@ -1780,7 +1780,7 @@
                 <a:ea typeface="Calibri" pitchFamily="34" charset="-122"/>
                 <a:cs typeface="Calibri" pitchFamily="34" charset="-120"/>
               </a:rPr>
-              <a:t>🎤 Final project demos — graded</a:t>
+              <a:t>🎤 Final project demo videos — graded (submitted with the report)</a:t>
             </a:r>
             <a:endParaRPr lang="en-US" sz="1350" dirty="0"/>
           </a:p>
@@ -1827,7 +1827,7 @@
       </p:sp>
       <p:pic>
         <p:nvPicPr>
-          <p:cNvPr id="12" name="Image 1" descr="/Users/pop7/Library/CloudStorage/OneDrive-MonsterConnectCo.,Ltd/Lecture/KOSEN69 - software-security/slides/pptx/assets/logo-small.png">    </p:cNvPr>
+          <p:cNvPr id="12" name="Image 1" descr="/private/tmp/claude-501/-Users-pop7-Library-CloudStorage-OneDrive-MonsterConnectCo--Ltd-Lecture-KOSEN69---software-security/f63a82af-e1ad-40ed-89c4-03c6ca776e3f/scratchpad/lq-docs/slides/pptx/assets/logo-small.png">    </p:cNvPr>
           <p:cNvPicPr>
             <a:picLocks noChangeAspect="1"/>
           </p:cNvPicPr>
@@ -2128,7 +2128,7 @@
       </p:sp>
       <p:pic>
         <p:nvPicPr>
-          <p:cNvPr id="8" name="Image 1" descr="/Users/pop7/Library/CloudStorage/OneDrive-MonsterConnectCo.,Ltd/Lecture/KOSEN69 - software-security/slides/pptx/assets/logo-small.png">    </p:cNvPr>
+          <p:cNvPr id="8" name="Image 1" descr="/private/tmp/claude-501/-Users-pop7-Library-CloudStorage-OneDrive-MonsterConnectCo--Ltd-Lecture-KOSEN69---software-security/f63a82af-e1ad-40ed-89c4-03c6ca776e3f/scratchpad/lq-docs/slides/pptx/assets/logo-small.png">    </p:cNvPr>
           <p:cNvPicPr>
             <a:picLocks noChangeAspect="1"/>
           </p:cNvPicPr>
@@ -2444,7 +2444,7 @@
                 <a:ea typeface="Calibri" pitchFamily="34" charset="-122"/>
                 <a:cs typeface="Calibri" pitchFamily="34" charset="-120"/>
               </a:rPr>
-              <a:t>Submit a recorded video walkthrough before the session — graded asynchronously on the rubric</a:t>
+              <a:t>Recorded video walkthrough, linked in the report and due with it — graded asynchronously on the rubric</a:t>
             </a:r>
             <a:endParaRPr lang="en-US" sz="1400" dirty="0"/>
           </a:p>
@@ -2465,7 +2465,7 @@
                 <a:ea typeface="Calibri" pitchFamily="34" charset="-122"/>
                 <a:cs typeface="Calibri" pitchFamily="34" charset="-120"/>
               </a:rPr>
-              <a:t>3-min live Q&amp;A per team on the day (not a live demo slot)</a:t>
+              <a:t>No per-team live slot — the instructor may call a team for a short live Q&amp;A</a:t>
             </a:r>
             <a:endParaRPr lang="en-US" sz="1400" dirty="0"/>
           </a:p>
@@ -2512,7 +2512,7 @@
       </p:sp>
       <p:pic>
         <p:nvPicPr>
-          <p:cNvPr id="9" name="Image 1" descr="/Users/pop7/Library/CloudStorage/OneDrive-MonsterConnectCo.,Ltd/Lecture/KOSEN69 - software-security/slides/pptx/assets/logo-small.png">    </p:cNvPr>
+          <p:cNvPr id="9" name="Image 1" descr="/private/tmp/claude-501/-Users-pop7-Library-CloudStorage-OneDrive-MonsterConnectCo--Ltd-Lecture-KOSEN69---software-security/f63a82af-e1ad-40ed-89c4-03c6ca776e3f/scratchpad/lq-docs/slides/pptx/assets/logo-small.png">    </p:cNvPr>
           <p:cNvPicPr>
             <a:picLocks noChangeAspect="1"/>
           </p:cNvPicPr>
@@ -2724,7 +2724,7 @@
                 <a:ea typeface="Calibri" pitchFamily="34" charset="-122"/>
                 <a:cs typeface="Calibri" pitchFamily="34" charset="-120"/>
               </a:rPr>
-              <a:t>Video walkthrough submitted before the session</a:t>
+              <a:t>Video walkthrough link in your report (due with the report)</a:t>
             </a:r>
             <a:endParaRPr lang="en-US" sz="1400" dirty="0"/>
           </a:p>
@@ -2813,7 +2813,7 @@
       </p:sp>
       <p:pic>
         <p:nvPicPr>
-          <p:cNvPr id="8" name="Image 1" descr="/Users/pop7/Library/CloudStorage/OneDrive-MonsterConnectCo.,Ltd/Lecture/KOSEN69 - software-security/slides/pptx/assets/logo-small.png">    </p:cNvPr>
+          <p:cNvPr id="8" name="Image 1" descr="/private/tmp/claude-501/-Users-pop7-Library-CloudStorage-OneDrive-MonsterConnectCo--Ltd-Lecture-KOSEN69---software-security/f63a82af-e1ad-40ed-89c4-03c6ca776e3f/scratchpad/lq-docs/slides/pptx/assets/logo-small.png">    </p:cNvPr>
           <p:cNvPicPr>
             <a:picLocks noChangeAspect="1"/>
           </p:cNvPicPr>
@@ -2947,7 +2947,7 @@
       </p:sp>
       <p:pic>
         <p:nvPicPr>
-          <p:cNvPr id="4" name="Image 0" descr="/Users/pop7/Library/CloudStorage/OneDrive-MonsterConnectCo.,Ltd/Lecture/KOSEN69 - software-security/slides/pptx/assets/logo-small.png">    </p:cNvPr>
+          <p:cNvPr id="4" name="Image 0" descr="/private/tmp/claude-501/-Users-pop7-Library-CloudStorage-OneDrive-MonsterConnectCo--Ltd-Lecture-KOSEN69---software-security/f63a82af-e1ad-40ed-89c4-03c6ca776e3f/scratchpad/lq-docs/slides/pptx/assets/logo-small.png">    </p:cNvPr>
           <p:cNvPicPr>
             <a:picLocks noChangeAspect="1"/>
           </p:cNvPicPr>

--- a/slides/pptx/week19.pptx
+++ b/slides/pptx/week19.pptx
@@ -507,7 +507,7 @@
           <a:p>
             <a:r>
               <a:rPr lang="en-US" dirty="0"/>
-              <a:t>The finale — make it celebratory + high-energy. Before class: graded flags for challenges 1–6 and 11 come from each student's own hosted instance (confirm everyone can log in and reach one); bring up the local targets for 7–10 and 12, open CTFd, set the demo schedule. Confirm projects run. ~2 min.</a:t>
+              <a:t>The finale — make it celebratory + high-energy. Before class: graded flags for challenges 1–8, 12 and 14 come from each student's own hosted instance (confirm everyone can log in and reach one, and flip Smash (#8) from hidden to visible); bring up the local targets for 9, 10, 11 and 13, open CTFd, set the demo schedule. Confirm projects run. ~2 min.</a:t>
             </a:r>
             <a:endParaRPr lang="en-US" dirty="0"/>
           </a:p>
@@ -683,7 +683,7 @@
           <a:p>
             <a:r>
               <a:rPr lang="en-US" dirty="0"/>
-              <a:t>Run from ctf.md (graded, 12 challenges/150 pts) + exams/item-bank.md (CTF pool, incl. the boss chain). CTFd's live board runs more challenges at different point values for engagement/leaderboard — that scoreboard is NOT the grade; ctf.md's submission is. Dynamic scoring + first-blood bonus on CTFd; announce first-bloods aloud for hype. Prizes for top Houses.</a:t>
+              <a:t>Run from ctf.md (graded, 14 challenges/165 pts) + exams/item-bank.md (CTF pool, incl. the boss chain). CTFd's live board runs more challenges at different point values for engagement/leaderboard — that scoreboard is NOT the grade; ctf.md's submission is. Dynamic scoring + first-blood bonus on CTFd; announce first-bloods aloud for hype. Prizes for top Houses.</a:t>
             </a:r>
             <a:endParaRPr lang="en-US" dirty="0"/>
           </a:p>
@@ -1322,7 +1322,7 @@
       </p:grpSpPr>
       <p:pic>
         <p:nvPicPr>
-          <p:cNvPr id="2" name="Image 0" descr="/private/tmp/claude-501/-Users-pop7-Library-CloudStorage-OneDrive-MonsterConnectCo--Ltd-Lecture-KOSEN69---software-security/f63a82af-e1ad-40ed-89c4-03c6ca776e3f/scratchpad/lq-docs/slides/pptx/assets/logo-small.png">    </p:cNvPr>
+          <p:cNvPr id="2" name="Image 0" descr="/private/tmp/claude-501/-Users-pop7-Library-CloudStorage-OneDrive-MonsterConnectCo--Ltd-Lecture-KOSEN69---software-security/99bf711f-59ac-440f-b5a8-deb60f96a23e/scratchpad/swsec/slides/pptx/assets/logo-small.png">    </p:cNvPr>
           <p:cNvPicPr>
             <a:picLocks noChangeAspect="1"/>
           </p:cNvPicPr>
@@ -1827,7 +1827,7 @@
       </p:sp>
       <p:pic>
         <p:nvPicPr>
-          <p:cNvPr id="12" name="Image 1" descr="/private/tmp/claude-501/-Users-pop7-Library-CloudStorage-OneDrive-MonsterConnectCo--Ltd-Lecture-KOSEN69---software-security/f63a82af-e1ad-40ed-89c4-03c6ca776e3f/scratchpad/lq-docs/slides/pptx/assets/logo-small.png">    </p:cNvPr>
+          <p:cNvPr id="12" name="Image 1" descr="/private/tmp/claude-501/-Users-pop7-Library-CloudStorage-OneDrive-MonsterConnectCo--Ltd-Lecture-KOSEN69---software-security/99bf711f-59ac-440f-b5a8-deb60f96a23e/scratchpad/swsec/slides/pptx/assets/logo-small.png">    </p:cNvPr>
           <p:cNvPicPr>
             <a:picLocks noChangeAspect="1"/>
           </p:cNvPicPr>
@@ -1980,11 +1980,11 @@
         <p:spPr>
           <a:xfrm>
             <a:off x="457200" y="1325880"/>
-            <a:ext cx="8229600" cy="1609344"/>
+            <a:ext cx="8229600" cy="1810512"/>
           </a:xfrm>
           <a:prstGeom prst="roundRect">
             <a:avLst>
-              <a:gd name="adj" fmla="val 4545"/>
+              <a:gd name="adj" fmla="val 4040"/>
             </a:avLst>
           </a:prstGeom>
           <a:solidFill>
@@ -2009,7 +2009,7 @@
         <p:spPr>
           <a:xfrm>
             <a:off x="731520" y="1435608"/>
-            <a:ext cx="7680960" cy="1389888"/>
+            <a:ext cx="7680960" cy="1591056"/>
           </a:xfrm>
           <a:prstGeom prst="rect">
             <a:avLst/>
@@ -2039,7 +2039,7 @@
                 <a:ea typeface="Calibri" pitchFamily="34" charset="-122"/>
                 <a:cs typeface="Calibri" pitchFamily="34" charset="-120"/>
               </a:rPr>
-              <a:t>Web · API · supply chain · cloud · memory safety · LLM/agentic</a:t>
+              <a:t>Web · API · memory safety · supply chain · cloud · LLM/agentic · DevSecOps — 14 challenges, 165 pts</a:t>
             </a:r>
             <a:endParaRPr lang="en-US" sz="1400" dirty="0"/>
           </a:p>
@@ -2128,7 +2128,7 @@
       </p:sp>
       <p:pic>
         <p:nvPicPr>
-          <p:cNvPr id="8" name="Image 1" descr="/private/tmp/claude-501/-Users-pop7-Library-CloudStorage-OneDrive-MonsterConnectCo--Ltd-Lecture-KOSEN69---software-security/f63a82af-e1ad-40ed-89c4-03c6ca776e3f/scratchpad/lq-docs/slides/pptx/assets/logo-small.png">    </p:cNvPr>
+          <p:cNvPr id="8" name="Image 1" descr="/private/tmp/claude-501/-Users-pop7-Library-CloudStorage-OneDrive-MonsterConnectCo--Ltd-Lecture-KOSEN69---software-security/99bf711f-59ac-440f-b5a8-deb60f96a23e/scratchpad/swsec/slides/pptx/assets/logo-small.png">    </p:cNvPr>
           <p:cNvPicPr>
             <a:picLocks noChangeAspect="1"/>
           </p:cNvPicPr>
@@ -2512,7 +2512,7 @@
       </p:sp>
       <p:pic>
         <p:nvPicPr>
-          <p:cNvPr id="9" name="Image 1" descr="/private/tmp/claude-501/-Users-pop7-Library-CloudStorage-OneDrive-MonsterConnectCo--Ltd-Lecture-KOSEN69---software-security/f63a82af-e1ad-40ed-89c4-03c6ca776e3f/scratchpad/lq-docs/slides/pptx/assets/logo-small.png">    </p:cNvPr>
+          <p:cNvPr id="9" name="Image 1" descr="/private/tmp/claude-501/-Users-pop7-Library-CloudStorage-OneDrive-MonsterConnectCo--Ltd-Lecture-KOSEN69---software-security/99bf711f-59ac-440f-b5a8-deb60f96a23e/scratchpad/swsec/slides/pptx/assets/logo-small.png">    </p:cNvPr>
           <p:cNvPicPr>
             <a:picLocks noChangeAspect="1"/>
           </p:cNvPicPr>
@@ -2813,7 +2813,7 @@
       </p:sp>
       <p:pic>
         <p:nvPicPr>
-          <p:cNvPr id="8" name="Image 1" descr="/private/tmp/claude-501/-Users-pop7-Library-CloudStorage-OneDrive-MonsterConnectCo--Ltd-Lecture-KOSEN69---software-security/f63a82af-e1ad-40ed-89c4-03c6ca776e3f/scratchpad/lq-docs/slides/pptx/assets/logo-small.png">    </p:cNvPr>
+          <p:cNvPr id="8" name="Image 1" descr="/private/tmp/claude-501/-Users-pop7-Library-CloudStorage-OneDrive-MonsterConnectCo--Ltd-Lecture-KOSEN69---software-security/99bf711f-59ac-440f-b5a8-deb60f96a23e/scratchpad/swsec/slides/pptx/assets/logo-small.png">    </p:cNvPr>
           <p:cNvPicPr>
             <a:picLocks noChangeAspect="1"/>
           </p:cNvPicPr>
@@ -2947,7 +2947,7 @@
       </p:sp>
       <p:pic>
         <p:nvPicPr>
-          <p:cNvPr id="4" name="Image 0" descr="/private/tmp/claude-501/-Users-pop7-Library-CloudStorage-OneDrive-MonsterConnectCo--Ltd-Lecture-KOSEN69---software-security/f63a82af-e1ad-40ed-89c4-03c6ca776e3f/scratchpad/lq-docs/slides/pptx/assets/logo-small.png">    </p:cNvPr>
+          <p:cNvPr id="4" name="Image 0" descr="/private/tmp/claude-501/-Users-pop7-Library-CloudStorage-OneDrive-MonsterConnectCo--Ltd-Lecture-KOSEN69---software-security/99bf711f-59ac-440f-b5a8-deb60f96a23e/scratchpad/swsec/slides/pptx/assets/logo-small.png">    </p:cNvPr>
           <p:cNvPicPr>
             <a:picLocks noChangeAspect="1"/>
           </p:cNvPicPr>
